--- a/site/clases/parte-3-estadistica-inferencial/186-cuped-sequential-testing-always-valid-p-values/clase-186-cuped-sequential-testing-always-valid-p-values-presentacion.pptx
+++ b/site/clases/parte-3-estadistica-inferencial/186-cuped-sequential-testing-always-valid-p-values/clase-186-cuped-sequential-testing-always-valid-p-values-presentacion.pptx
@@ -3272,7 +3272,7 @@
                 </a:solidFill>
                 <a:latin typeface="Segoe UI"/>
               </a:rPr>
-              <a:t>Parte: 3 — Estadística Inferencial y Causal · Fuente: Deng et al. (2013) CUPED + Howard et al. (2021) always-valid + Kohavi et al. (2020).  Duración estimada: 85 min.</a:t>
+              <a:t>Parte: 3 — Estadística Inferencial y Causal · Fuente: Deng et al. (2013) CUPED + Howard et al. (2021) always-valid + Kohavi et al. (2020).  Duración estimada: 85 min. · Nivel: Avanzado</a:t>
             </a:r>
           </a:p>
         </p:txBody>
@@ -3581,7 +3581,7 @@
                 </a:solidFill>
                 <a:latin typeface="Segoe UI"/>
               </a:rPr>
-              <a:t>Parte: 3 — Estadística Inferencial y Causal · Fuente: Deng et al. (2013) CUPED + Howard et al. (2021) always-valid + Kohavi et al. (2020).  Duración estimada: 85 min.</a:t>
+              <a:t>Parte: 3 — Estadística Inferencial y Causal · Fuente: Deng et al. (2013) CUPED + Howard et al. (2021) always-valid + Kohavi et al. (2020).  Duración estimada: 85 min. · Nivel: Avanzado</a:t>
             </a:r>
           </a:p>
         </p:txBody>
@@ -4823,7 +4823,7 @@
                 </a:solidFill>
                 <a:latin typeface="Segoe UI"/>
               </a:rPr>
-              <a:t>Tres trucos modernos de A/B testing industrial: CUPED reduce varianza usando pre-experiment data (~50% menos sample). Sequential testing te deja peekear sin inflar el error tipo I. Requiere: pip install numpy scipy.</a:t>
+              <a:t>CUPED en una frase: usar una covariable pre-experimento (algo que ya sabías de cada usuario antes de tratarlo) para reducir la varianza de la métrica y así detectar efectos más chicos con menos muestra. Si esa covariable correlaciona ρ con la métrica, la varianza cae a (1-ρ²) — con ρ=0.7 ya recortás ~la mitad del ruido, y sin sesgar el efecto (la covariable es previa; el tratamiento no la afecta).</a:t>
             </a:r>
           </a:p>
         </p:txBody>
